--- a/ppt/IoTAI17-MLP.pptx
+++ b/ppt/IoTAI17-MLP.pptx
@@ -5,10 +5,10 @@
     <p:sldMasterId id="2147483653" r:id="rId1"/>
   </p:sldMasterIdLst>
   <p:notesMasterIdLst>
-    <p:notesMasterId r:id="rId33"/>
+    <p:notesMasterId r:id="rId32"/>
   </p:notesMasterIdLst>
   <p:handoutMasterIdLst>
-    <p:handoutMasterId r:id="rId34"/>
+    <p:handoutMasterId r:id="rId33"/>
   </p:handoutMasterIdLst>
   <p:sldIdLst>
     <p:sldId id="264" r:id="rId2"/>
@@ -40,8 +40,7 @@
     <p:sldId id="318" r:id="rId28"/>
     <p:sldId id="331" r:id="rId29"/>
     <p:sldId id="333" r:id="rId30"/>
-    <p:sldId id="337" r:id="rId31"/>
-    <p:sldId id="336" r:id="rId32"/>
+    <p:sldId id="336" r:id="rId31"/>
   </p:sldIdLst>
   <p:sldSz cx="9144000" cy="6858000" type="screen4x3"/>
   <p:notesSz cx="6648450" cy="9782175"/>
@@ -7735,118 +7734,6 @@
 </file>
 
 <file path=ppt/slides/slide30.xml><?xml version="1.0" encoding="utf-8"?>
-<p:sld xmlns:a="http://schemas.openxmlformats.org/drawingml/2006/main" xmlns:r="http://schemas.openxmlformats.org/officeDocument/2006/relationships" xmlns:p="http://schemas.openxmlformats.org/presentationml/2006/main">
-  <p:cSld>
-    <p:spTree>
-      <p:nvGrpSpPr>
-        <p:cNvPr id="1" name=""/>
-        <p:cNvGrpSpPr/>
-        <p:nvPr/>
-      </p:nvGrpSpPr>
-      <p:grpSpPr>
-        <a:xfrm>
-          <a:off x="0" y="0"/>
-          <a:ext cx="0" cy="0"/>
-          <a:chOff x="0" y="0"/>
-          <a:chExt cx="0" cy="0"/>
-        </a:xfrm>
-      </p:grpSpPr>
-      <p:sp>
-        <p:nvSpPr>
-          <p:cNvPr id="2" name="Titre 1">
-            <a:extLst>
-              <a:ext uri="{FF2B5EF4-FFF2-40B4-BE49-F238E27FC236}">
-                <a16:creationId xmlns:a16="http://schemas.microsoft.com/office/drawing/2014/main" id="{9D1D7C19-8F9B-E817-AC1C-58F826CE19BC}"/>
-              </a:ext>
-            </a:extLst>
-          </p:cNvPr>
-          <p:cNvSpPr>
-            <a:spLocks noGrp="1"/>
-          </p:cNvSpPr>
-          <p:nvPr>
-            <p:ph type="title"/>
-          </p:nvPr>
-        </p:nvSpPr>
-        <p:spPr/>
-        <p:txBody>
-          <a:bodyPr/>
-          <a:lstStyle/>
-          <a:p>
-            <a:r>
-              <a:rPr lang="fr-FR" dirty="0" err="1"/>
-              <a:t>MLPMicro</a:t>
-            </a:r>
-            <a:endParaRPr lang="fr-FR" dirty="0"/>
-          </a:p>
-        </p:txBody>
-      </p:sp>
-      <p:sp>
-        <p:nvSpPr>
-          <p:cNvPr id="3" name="Espace réservé du contenu 2">
-            <a:extLst>
-              <a:ext uri="{FF2B5EF4-FFF2-40B4-BE49-F238E27FC236}">
-                <a16:creationId xmlns:a16="http://schemas.microsoft.com/office/drawing/2014/main" id="{5517BB9E-9117-22F0-9BBE-5F3CE5305D7B}"/>
-              </a:ext>
-            </a:extLst>
-          </p:cNvPr>
-          <p:cNvSpPr>
-            <a:spLocks noGrp="1"/>
-          </p:cNvSpPr>
-          <p:nvPr>
-            <p:ph idx="1"/>
-          </p:nvPr>
-        </p:nvSpPr>
-        <p:spPr/>
-        <p:txBody>
-          <a:bodyPr/>
-          <a:lstStyle/>
-          <a:p>
-            <a:r>
-              <a:rPr lang="fr-FR" dirty="0" err="1"/>
-              <a:t>MLPMicro</a:t>
-            </a:r>
-            <a:r>
-              <a:rPr lang="fr-FR" dirty="0"/>
-              <a:t> est un outil alternatif</a:t>
-            </a:r>
-          </a:p>
-          <a:p>
-            <a:r>
-              <a:rPr lang="fr-FR" dirty="0"/>
-              <a:t>Voir micromlp_demo.py</a:t>
-            </a:r>
-          </a:p>
-          <a:p>
-            <a:r>
-              <a:rPr lang="fr-FR">
-                <a:hlinkClick r:id="rId2"/>
-              </a:rPr>
-              <a:t>https://github.com/jczic/MicroMLP</a:t>
-            </a:r>
-            <a:endParaRPr lang="fr-FR"/>
-          </a:p>
-          <a:p>
-            <a:endParaRPr lang="fr-FR" dirty="0"/>
-          </a:p>
-          <a:p>
-            <a:endParaRPr lang="fr-FR" dirty="0"/>
-          </a:p>
-        </p:txBody>
-      </p:sp>
-    </p:spTree>
-    <p:extLst>
-      <p:ext uri="{BB962C8B-B14F-4D97-AF65-F5344CB8AC3E}">
-        <p14:creationId xmlns:p14="http://schemas.microsoft.com/office/powerpoint/2010/main" val="3043753934"/>
-      </p:ext>
-    </p:extLst>
-  </p:cSld>
-  <p:clrMapOvr>
-    <a:masterClrMapping/>
-  </p:clrMapOvr>
-</p:sld>
-</file>
-
-<file path=ppt/slides/slide31.xml><?xml version="1.0" encoding="utf-8"?>
 <p:sld xmlns:a="http://schemas.openxmlformats.org/drawingml/2006/main" xmlns:r="http://schemas.openxmlformats.org/officeDocument/2006/relationships" xmlns:p="http://schemas.openxmlformats.org/presentationml/2006/main">
   <p:cSld>
     <p:spTree>
